--- a/decks/hist-holocaust/hist-holocaust_ch4_ghettos.pptx
+++ b/decks/hist-holocaust/hist-holocaust_ch4_ghettos.pptx
@@ -128,12 +128,12 @@
   <p:extLst>
     <p:ext uri="{521415D9-36F7-43E2-AB2F-B90AF26B5E84}">
       <p14:sectionLst xmlns:p14="http://schemas.microsoft.com/office/powerpoint/2010/main">
-        <p14:section name="Opening" id="{d48e835f-8a15-ed7e-fa36-af771e203da3}">
+        <p14:section name="Opening" id="{c2495a7a-0575-bd3a-a2a8-a46300c2cc4c}">
           <p14:sldIdLst>
             <p14:sldId id="256"/>
           </p14:sldIdLst>
         </p14:section>
-        <p14:section name="Gate" id="{3eb67202-1b3a-e9c7-f497-aa3632f1692f}">
+        <p14:section name="Gate" id="{a2c9e36d-c641-4b5c-de30-30041db2c552}">
           <p14:sldIdLst>
             <p14:sldId id="257"/>
             <p14:sldId id="258"/>
@@ -141,19 +141,19 @@
             <p14:sldId id="260"/>
           </p14:sldIdLst>
         </p14:section>
-        <p14:section name="Pre-teach" id="{3afa6936-bd9e-9621-1b2c-a0b86ddcb8b3}">
+        <p14:section name="Pre-teach" id="{c1dd8cfe-8ecd-0b67-5820-c1f31644765d}">
           <p14:sldIdLst>
             <p14:sldId id="261"/>
             <p14:sldId id="262"/>
           </p14:sldIdLst>
         </p14:section>
-        <p14:section name="Read-along" id="{7ed90c57-863f-7ecf-177c-1c2700c776b9}">
+        <p14:section name="Read-along" id="{dac2b3a9-98d6-7c56-9a7a-f90dfeb2a0b2}">
           <p14:sldIdLst>
             <p14:sldId id="263"/>
             <p14:sldId id="264"/>
           </p14:sldIdLst>
         </p14:section>
-        <p14:section name="Teach" id="{67cb9e54-8fab-4197-82da-db56f40ec61b}">
+        <p14:section name="Teach" id="{9b5ec498-6939-a3b7-c979-e05618ae001d}">
           <p14:sldIdLst>
             <p14:sldId id="265"/>
             <p14:sldId id="266"/>
@@ -161,7 +161,7 @@
             <p14:sldId id="268"/>
           </p14:sldIdLst>
         </p14:section>
-        <p14:section name="Routes" id="{8fdb9d1d-ed30-1d60-ed12-4046d0507678}">
+        <p14:section name="Routes" id="{c09687fa-b80e-5ac0-223a-c6338102971f}">
           <p14:sldIdLst>
             <p14:sldId id="269"/>
             <p14:sldId id="270"/>
@@ -169,12 +169,12 @@
             <p14:sldId id="272"/>
           </p14:sldIdLst>
         </p14:section>
-        <p14:section name="Close" id="{3b7c34ca-b201-fcee-ecbc-1095ac3e9605}">
+        <p14:section name="Close" id="{d2c01c6c-c9fb-e595-9e79-7f7e77f49d15}">
           <p14:sldIdLst>
             <p14:sldId id="273"/>
           </p14:sldIdLst>
         </p14:section>
-        <p14:section name="Answers" id="{f5fd5a0a-02ce-73bb-b282-c09a8e325224}">
+        <p14:section name="Answers" id="{9158e8f3-725d-8e7e-28c9-88f523c4ed62}">
           <p14:sldIdLst>
             <p14:sldId id="274"/>
             <p14:sldId id="275"/>
